--- a/docs/SLIDE_FINAL_DEFENSE_15MIN.pptx
+++ b/docs/SLIDE_FINAL_DEFENSE_15MIN.pptx
@@ -2260,7 +2260,7 @@
                 <a:ea typeface="Arial" pitchFamily="34" charset="-122"/>
                 <a:cs typeface="Arial" pitchFamily="34" charset="-120"/>
               </a:rPr>
-              <a:t>  5. Linh Campochia (Frontend Lead &amp; Tác giả chính Bài báo IEEE)
+              <a:t>  5. Trần Thành Nguyên (Frontend Lead &amp; Tác giả chính Bài báo IEEE)
 </a:t>
             </a:r>
             <a:endParaRPr lang="en-US" sz="1400" dirty="0"/>

--- a/docs/SLIDE_FINAL_DEFENSE_15MIN.pptx
+++ b/docs/SLIDE_FINAL_DEFENSE_15MIN.pptx
@@ -2260,7 +2260,7 @@
                 <a:ea typeface="Arial" pitchFamily="34" charset="-122"/>
                 <a:cs typeface="Arial" pitchFamily="34" charset="-120"/>
               </a:rPr>
-              <a:t>  5. Trần Thành Nguyên (Frontend Lead &amp; Tác giả chính Bài báo IEEE)
+              <a:t>  5. Trần Thanh Nguyên (Frontend Lead &amp; Tác giả chính Bài báo IEEE)
 </a:t>
             </a:r>
             <a:endParaRPr lang="en-US" sz="1400" dirty="0"/>
